--- a/backend/data/attachments/trust_registration_14.pptx
+++ b/backend/data/attachments/trust_registration_14.pptx
@@ -3188,17 +3188,17 @@
           <a:lstStyle/>
           <a:p>
             <a:r>
-              <a:t>Scale: 186 million RMB</a:t>
-            </a:r>
-          </a:p>
-          <a:p>
-            <a:r>
-              <a:t>Duration: 24 months</a:t>
-            </a:r>
-          </a:p>
-          <a:p>
-            <a:r>
-              <a:t>Expected Return: 5.8% p.a.</a:t>
+              <a:t>Scale: 135.8 million RMB</a:t>
+            </a:r>
+          </a:p>
+          <a:p>
+            <a:r>
+              <a:t>Duration: 24个月</a:t>
+            </a:r>
+          </a:p>
+          <a:p>
+            <a:r>
+              <a:t>Expected Return: 6.6% p.a.</a:t>
             </a:r>
           </a:p>
         </p:txBody>
@@ -3258,17 +3258,17 @@
           <a:lstStyle/>
           <a:p>
             <a:r>
-              <a:t>Senior Tranche: 73%</a:t>
-            </a:r>
-          </a:p>
-          <a:p>
-            <a:r>
-              <a:t>Subordinate Tranche: 25%</a:t>
-            </a:r>
-          </a:p>
-          <a:p>
-            <a:r>
-              <a:t>Risk Mitigation: Land mortgage + Equity pledge</a:t>
+              <a:t>Senior Tranche: 74%</a:t>
+            </a:r>
+          </a:p>
+          <a:p>
+            <a:r>
+              <a:t>Subordinate Tranche: 37%</a:t>
+            </a:r>
+          </a:p>
+          <a:p>
+            <a:r>
+              <a:t>Risk Mitigation: 土地抵押+应收账款质押</a:t>
             </a:r>
           </a:p>
         </p:txBody>
@@ -3328,17 +3328,17 @@
           <a:lstStyle/>
           <a:p>
             <a:r>
-              <a:t>Credit Rating: AA</a:t>
-            </a:r>
-          </a:p>
-          <a:p>
-            <a:r>
-              <a:t>LTV Ratio: 40%</a:t>
-            </a:r>
-          </a:p>
-          <a:p>
-            <a:r>
-              <a:t>Debt Service Coverage: 2.0x</a:t>
+              <a:t>Credit Rating: A+</a:t>
+            </a:r>
+          </a:p>
+          <a:p>
+            <a:r>
+              <a:t>LTV Ratio: 46%</a:t>
+            </a:r>
+          </a:p>
+          <a:p>
+            <a:r>
+              <a:t>Debt Service Coverage: 1.8x</a:t>
             </a:r>
           </a:p>
         </p:txBody>
